--- a/ppt/MachineLearning13-ScikitLearn.pptx
+++ b/ppt/MachineLearning13-ScikitLearn.pptx
@@ -5,10 +5,10 @@
     <p:sldMasterId id="2147483653" r:id="rId1"/>
   </p:sldMasterIdLst>
   <p:notesMasterIdLst>
-    <p:notesMasterId r:id="rId19"/>
+    <p:notesMasterId r:id="rId17"/>
   </p:notesMasterIdLst>
   <p:handoutMasterIdLst>
-    <p:handoutMasterId r:id="rId20"/>
+    <p:handoutMasterId r:id="rId18"/>
   </p:handoutMasterIdLst>
   <p:sldIdLst>
     <p:sldId id="264" r:id="rId2"/>
@@ -26,8 +26,6 @@
     <p:sldId id="289" r:id="rId14"/>
     <p:sldId id="290" r:id="rId15"/>
     <p:sldId id="291" r:id="rId16"/>
-    <p:sldId id="292" r:id="rId17"/>
-    <p:sldId id="293" r:id="rId18"/>
   </p:sldIdLst>
   <p:sldSz cx="9144000" cy="6858000" type="screen4x3"/>
   <p:notesSz cx="6648450" cy="9782175"/>
@@ -4129,8 +4127,8 @@
           <a:lstStyle/>
           <a:p>
             <a:r>
-              <a:rPr lang="fr-FR" dirty="0" err="1"/>
-              <a:t>Echantillonage</a:t>
+              <a:rPr lang="fr-FR"/>
+              <a:t>Échantillonnage</a:t>
             </a:r>
             <a:endParaRPr lang="fr-FR" dirty="0"/>
           </a:p>
@@ -4627,373 +4625,6 @@
     <p:extLst>
       <p:ext uri="{BB962C8B-B14F-4D97-AF65-F5344CB8AC3E}">
         <p14:creationId xmlns:p14="http://schemas.microsoft.com/office/powerpoint/2010/main" val="3886577066"/>
-      </p:ext>
-    </p:extLst>
-  </p:cSld>
-  <p:clrMapOvr>
-    <a:masterClrMapping/>
-  </p:clrMapOvr>
-</p:sld>
-</file>
-
-<file path=ppt/slides/slide16.xml><?xml version="1.0" encoding="utf-8"?>
-<p:sld xmlns:a="http://schemas.openxmlformats.org/drawingml/2006/main" xmlns:r="http://schemas.openxmlformats.org/officeDocument/2006/relationships" xmlns:p="http://schemas.openxmlformats.org/presentationml/2006/main">
-  <p:cSld>
-    <p:spTree>
-      <p:nvGrpSpPr>
-        <p:cNvPr id="1" name=""/>
-        <p:cNvGrpSpPr/>
-        <p:nvPr/>
-      </p:nvGrpSpPr>
-      <p:grpSpPr>
-        <a:xfrm>
-          <a:off x="0" y="0"/>
-          <a:ext cx="0" cy="0"/>
-          <a:chOff x="0" y="0"/>
-          <a:chExt cx="0" cy="0"/>
-        </a:xfrm>
-      </p:grpSpPr>
-      <p:sp>
-        <p:nvSpPr>
-          <p:cNvPr id="2" name="Titre 1"/>
-          <p:cNvSpPr>
-            <a:spLocks noGrp="1"/>
-          </p:cNvSpPr>
-          <p:nvPr>
-            <p:ph type="title"/>
-          </p:nvPr>
-        </p:nvSpPr>
-        <p:spPr/>
-        <p:txBody>
-          <a:bodyPr/>
-          <a:lstStyle/>
-          <a:p>
-            <a:r>
-              <a:rPr lang="fr-FR" dirty="0"/>
-              <a:t>Interprétation du résultat</a:t>
-            </a:r>
-          </a:p>
-        </p:txBody>
-      </p:sp>
-      <p:sp>
-        <p:nvSpPr>
-          <p:cNvPr id="3" name="Espace réservé du contenu 2"/>
-          <p:cNvSpPr>
-            <a:spLocks noGrp="1"/>
-          </p:cNvSpPr>
-          <p:nvPr>
-            <p:ph idx="1"/>
-          </p:nvPr>
-        </p:nvSpPr>
-        <p:spPr/>
-        <p:txBody>
-          <a:bodyPr/>
-          <a:lstStyle/>
-          <a:p>
-            <a:r>
-              <a:rPr lang="fr-FR" dirty="0"/>
-              <a:t>Evidement en ayant moins de données le résultat sur le training set sera un peu moins bon</a:t>
-            </a:r>
-          </a:p>
-          <a:p>
-            <a:r>
-              <a:rPr lang="fr-FR" dirty="0"/>
-              <a:t>Mais il faut rejouer la régression sur les </a:t>
-            </a:r>
-            <a:r>
-              <a:rPr lang="fr-FR" dirty="0" err="1"/>
-              <a:t>testing</a:t>
-            </a:r>
-            <a:r>
-              <a:rPr lang="fr-FR" dirty="0"/>
-              <a:t> set</a:t>
-            </a:r>
-          </a:p>
-          <a:p>
-            <a:pPr lvl="1"/>
-            <a:r>
-              <a:rPr lang="fr-FR" dirty="0"/>
-              <a:t>Il peut être nécessaire de rejouer le modèle plusieurs fois pour arriver à un résultat satisfaisant</a:t>
-            </a:r>
-          </a:p>
-          <a:p>
-            <a:pPr lvl="1"/>
-            <a:r>
-              <a:rPr lang="fr-FR" dirty="0"/>
-              <a:t>Training vs test</a:t>
-            </a:r>
-          </a:p>
-          <a:p>
-            <a:pPr lvl="1"/>
-            <a:endParaRPr lang="fr-FR" dirty="0"/>
-          </a:p>
-        </p:txBody>
-      </p:sp>
-      <p:pic>
-        <p:nvPicPr>
-          <p:cNvPr id="4" name="Image 3"/>
-          <p:cNvPicPr>
-            <a:picLocks noChangeAspect="1"/>
-          </p:cNvPicPr>
-          <p:nvPr/>
-        </p:nvPicPr>
-        <p:blipFill>
-          <a:blip r:embed="rId2"/>
-          <a:stretch>
-            <a:fillRect/>
-          </a:stretch>
-        </p:blipFill>
-        <p:spPr>
-          <a:xfrm>
-            <a:off x="899592" y="4482281"/>
-            <a:ext cx="3158514" cy="2314380"/>
-          </a:xfrm>
-          <a:prstGeom prst="rect">
-            <a:avLst/>
-          </a:prstGeom>
-        </p:spPr>
-      </p:pic>
-      <p:pic>
-        <p:nvPicPr>
-          <p:cNvPr id="5" name="Image 4"/>
-          <p:cNvPicPr>
-            <a:picLocks noChangeAspect="1"/>
-          </p:cNvPicPr>
-          <p:nvPr/>
-        </p:nvPicPr>
-        <p:blipFill>
-          <a:blip r:embed="rId3"/>
-          <a:stretch>
-            <a:fillRect/>
-          </a:stretch>
-        </p:blipFill>
-        <p:spPr>
-          <a:xfrm>
-            <a:off x="5220072" y="4565194"/>
-            <a:ext cx="3118678" cy="2231467"/>
-          </a:xfrm>
-          <a:prstGeom prst="rect">
-            <a:avLst/>
-          </a:prstGeom>
-        </p:spPr>
-      </p:pic>
-    </p:spTree>
-    <p:extLst>
-      <p:ext uri="{BB962C8B-B14F-4D97-AF65-F5344CB8AC3E}">
-        <p14:creationId xmlns:p14="http://schemas.microsoft.com/office/powerpoint/2010/main" val="3352354258"/>
-      </p:ext>
-    </p:extLst>
-  </p:cSld>
-  <p:clrMapOvr>
-    <a:masterClrMapping/>
-  </p:clrMapOvr>
-</p:sld>
-</file>
-
-<file path=ppt/slides/slide17.xml><?xml version="1.0" encoding="utf-8"?>
-<p:sld xmlns:a="http://schemas.openxmlformats.org/drawingml/2006/main" xmlns:r="http://schemas.openxmlformats.org/officeDocument/2006/relationships" xmlns:p="http://schemas.openxmlformats.org/presentationml/2006/main">
-  <p:cSld>
-    <p:spTree>
-      <p:nvGrpSpPr>
-        <p:cNvPr id="1" name=""/>
-        <p:cNvGrpSpPr/>
-        <p:nvPr/>
-      </p:nvGrpSpPr>
-      <p:grpSpPr>
-        <a:xfrm>
-          <a:off x="0" y="0"/>
-          <a:ext cx="0" cy="0"/>
-          <a:chOff x="0" y="0"/>
-          <a:chExt cx="0" cy="0"/>
-        </a:xfrm>
-      </p:grpSpPr>
-      <p:sp>
-        <p:nvSpPr>
-          <p:cNvPr id="2" name="Titre 1"/>
-          <p:cNvSpPr>
-            <a:spLocks noGrp="1"/>
-          </p:cNvSpPr>
-          <p:nvPr>
-            <p:ph type="title"/>
-          </p:nvPr>
-        </p:nvSpPr>
-        <p:spPr/>
-        <p:txBody>
-          <a:bodyPr/>
-          <a:lstStyle/>
-          <a:p>
-            <a:r>
-              <a:rPr lang="fr-FR" dirty="0"/>
-              <a:t>Echantillonnage</a:t>
-            </a:r>
-          </a:p>
-        </p:txBody>
-      </p:sp>
-      <p:sp>
-        <p:nvSpPr>
-          <p:cNvPr id="3" name="Espace réservé du contenu 2"/>
-          <p:cNvSpPr>
-            <a:spLocks noGrp="1"/>
-          </p:cNvSpPr>
-          <p:nvPr>
-            <p:ph idx="1"/>
-          </p:nvPr>
-        </p:nvSpPr>
-        <p:spPr/>
-        <p:txBody>
-          <a:bodyPr/>
-          <a:lstStyle/>
-          <a:p>
-            <a:r>
-              <a:rPr lang="fr-FR" dirty="0"/>
-              <a:t>Basé sur une fonctionnalité </a:t>
-            </a:r>
-            <a:r>
-              <a:rPr lang="fr-FR" dirty="0" err="1"/>
-              <a:t>numpy</a:t>
-            </a:r>
-            <a:endParaRPr lang="fr-FR" dirty="0"/>
-          </a:p>
-          <a:p>
-            <a:r>
-              <a:rPr lang="fr-FR" dirty="0" err="1"/>
-              <a:t>np.array</a:t>
-            </a:r>
-            <a:r>
-              <a:rPr lang="fr-FR" dirty="0"/>
-              <a:t>([2,8,0,10,9])[2,4] donne [0,9]</a:t>
-            </a:r>
-          </a:p>
-          <a:p>
-            <a:r>
-              <a:rPr lang="fr-FR" dirty="0"/>
-              <a:t>Cela donne pour un échantillon de 5000</a:t>
-            </a:r>
-          </a:p>
-          <a:p>
-            <a:pPr lvl="1"/>
-            <a:r>
-              <a:rPr lang="fr-FR" sz="2000" dirty="0" err="1">
-                <a:latin typeface="Courier New" panose="02070309020205020404" pitchFamily="49" charset="0"/>
-                <a:cs typeface="Courier New" panose="02070309020205020404" pitchFamily="49" charset="0"/>
-              </a:rPr>
-              <a:t>sample</a:t>
-            </a:r>
-            <a:r>
-              <a:rPr lang="fr-FR" sz="2000" dirty="0">
-                <a:latin typeface="Courier New" panose="02070309020205020404" pitchFamily="49" charset="0"/>
-                <a:cs typeface="Courier New" panose="02070309020205020404" pitchFamily="49" charset="0"/>
-              </a:rPr>
-              <a:t> = </a:t>
-            </a:r>
-            <a:r>
-              <a:rPr lang="fr-FR" sz="2000" dirty="0" err="1">
-                <a:latin typeface="Courier New" panose="02070309020205020404" pitchFamily="49" charset="0"/>
-                <a:cs typeface="Courier New" panose="02070309020205020404" pitchFamily="49" charset="0"/>
-              </a:rPr>
-              <a:t>np.random.randint</a:t>
-            </a:r>
-            <a:r>
-              <a:rPr lang="fr-FR" sz="2000" dirty="0">
-                <a:latin typeface="Courier New" panose="02070309020205020404" pitchFamily="49" charset="0"/>
-                <a:cs typeface="Courier New" panose="02070309020205020404" pitchFamily="49" charset="0"/>
-              </a:rPr>
-              <a:t>(70000, size=5000)</a:t>
-            </a:r>
-          </a:p>
-          <a:p>
-            <a:pPr lvl="1"/>
-            <a:r>
-              <a:rPr lang="fr-FR" sz="2000" dirty="0">
-                <a:latin typeface="Courier New" panose="02070309020205020404" pitchFamily="49" charset="0"/>
-                <a:cs typeface="Courier New" panose="02070309020205020404" pitchFamily="49" charset="0"/>
-              </a:rPr>
-              <a:t>data = </a:t>
-            </a:r>
-            <a:r>
-              <a:rPr lang="fr-FR" sz="2000" dirty="0" err="1">
-                <a:latin typeface="Courier New" panose="02070309020205020404" pitchFamily="49" charset="0"/>
-                <a:cs typeface="Courier New" panose="02070309020205020404" pitchFamily="49" charset="0"/>
-              </a:rPr>
-              <a:t>mnist.data</a:t>
-            </a:r>
-            <a:r>
-              <a:rPr lang="fr-FR" sz="2000" dirty="0">
-                <a:latin typeface="Courier New" panose="02070309020205020404" pitchFamily="49" charset="0"/>
-                <a:cs typeface="Courier New" panose="02070309020205020404" pitchFamily="49" charset="0"/>
-              </a:rPr>
-              <a:t>[</a:t>
-            </a:r>
-            <a:r>
-              <a:rPr lang="fr-FR" sz="2000" dirty="0" err="1">
-                <a:latin typeface="Courier New" panose="02070309020205020404" pitchFamily="49" charset="0"/>
-                <a:cs typeface="Courier New" panose="02070309020205020404" pitchFamily="49" charset="0"/>
-              </a:rPr>
-              <a:t>sample</a:t>
-            </a:r>
-            <a:r>
-              <a:rPr lang="fr-FR" sz="2000" dirty="0">
-                <a:latin typeface="Courier New" panose="02070309020205020404" pitchFamily="49" charset="0"/>
-                <a:cs typeface="Courier New" panose="02070309020205020404" pitchFamily="49" charset="0"/>
-              </a:rPr>
-              <a:t>]</a:t>
-            </a:r>
-          </a:p>
-          <a:p>
-            <a:pPr lvl="1"/>
-            <a:r>
-              <a:rPr lang="fr-FR" sz="2000" dirty="0" err="1">
-                <a:latin typeface="Courier New" panose="02070309020205020404" pitchFamily="49" charset="0"/>
-                <a:cs typeface="Courier New" panose="02070309020205020404" pitchFamily="49" charset="0"/>
-              </a:rPr>
-              <a:t>target</a:t>
-            </a:r>
-            <a:r>
-              <a:rPr lang="fr-FR" sz="2000" dirty="0">
-                <a:latin typeface="Courier New" panose="02070309020205020404" pitchFamily="49" charset="0"/>
-                <a:cs typeface="Courier New" panose="02070309020205020404" pitchFamily="49" charset="0"/>
-              </a:rPr>
-              <a:t> = </a:t>
-            </a:r>
-            <a:r>
-              <a:rPr lang="fr-FR" sz="2000" dirty="0" err="1">
-                <a:latin typeface="Courier New" panose="02070309020205020404" pitchFamily="49" charset="0"/>
-                <a:cs typeface="Courier New" panose="02070309020205020404" pitchFamily="49" charset="0"/>
-              </a:rPr>
-              <a:t>mnist.target</a:t>
-            </a:r>
-            <a:r>
-              <a:rPr lang="fr-FR" sz="2000" dirty="0">
-                <a:latin typeface="Courier New" panose="02070309020205020404" pitchFamily="49" charset="0"/>
-                <a:cs typeface="Courier New" panose="02070309020205020404" pitchFamily="49" charset="0"/>
-              </a:rPr>
-              <a:t>[</a:t>
-            </a:r>
-            <a:r>
-              <a:rPr lang="fr-FR" sz="2000" dirty="0" err="1">
-                <a:latin typeface="Courier New" panose="02070309020205020404" pitchFamily="49" charset="0"/>
-                <a:cs typeface="Courier New" panose="02070309020205020404" pitchFamily="49" charset="0"/>
-              </a:rPr>
-              <a:t>sample</a:t>
-            </a:r>
-            <a:r>
-              <a:rPr lang="fr-FR" sz="2000" dirty="0">
-                <a:latin typeface="Courier New" panose="02070309020205020404" pitchFamily="49" charset="0"/>
-                <a:cs typeface="Courier New" panose="02070309020205020404" pitchFamily="49" charset="0"/>
-              </a:rPr>
-              <a:t>]</a:t>
-            </a:r>
-          </a:p>
-          <a:p>
-            <a:pPr lvl="1"/>
-            <a:endParaRPr lang="fr-FR" dirty="0"/>
-          </a:p>
-        </p:txBody>
-      </p:sp>
-    </p:spTree>
-    <p:extLst>
-      <p:ext uri="{BB962C8B-B14F-4D97-AF65-F5344CB8AC3E}">
-        <p14:creationId xmlns:p14="http://schemas.microsoft.com/office/powerpoint/2010/main" val="1583722053"/>
       </p:ext>
     </p:extLst>
   </p:cSld>
@@ -5801,7 +5432,7 @@
             </a:r>
             <a:r>
               <a:rPr lang="fr-FR" dirty="0"/>
-              <a:t> effectue des régressions polynomiale</a:t>
+              <a:t> effectue des régressions polynomiales</a:t>
             </a:r>
           </a:p>
         </p:txBody>
@@ -6102,7 +5733,7 @@
             </a:r>
             <a:r>
               <a:rPr lang="fr-FR" dirty="0" err="1"/>
-              <a:t>pp.make_pipeline</a:t>
+              <a:t>pipe.make_pipeline</a:t>
             </a:r>
             <a:r>
               <a:rPr lang="fr-FR" dirty="0"/>
@@ -6110,7 +5741,7 @@
             </a:r>
             <a:r>
               <a:rPr lang="fr-FR" dirty="0" err="1"/>
-              <a:t>pipe.PolynomialFeatures</a:t>
+              <a:t>pp.PolynomialFeatures</a:t>
             </a:r>
             <a:r>
               <a:rPr lang="fr-FR" dirty="0"/>
